--- a/01 into+appcustomizer.pptx
+++ b/01 into+appcustomizer.pptx
@@ -17,7 +17,7 @@
     <p:sldId id="1549" r:id="rId6"/>
     <p:sldId id="1550" r:id="rId7"/>
     <p:sldId id="1551" r:id="rId8"/>
-    <p:sldId id="1581" r:id="rId9"/>
+    <p:sldId id="1547" r:id="rId9"/>
     <p:sldId id="1552" r:id="rId10"/>
     <p:sldId id="1553" r:id="rId11"/>
     <p:sldId id="1554" r:id="rId12"/>
@@ -145,7 +145,7 @@
             <p14:sldId id="1549"/>
             <p14:sldId id="1550"/>
             <p14:sldId id="1551"/>
-            <p14:sldId id="1581"/>
+            <p14:sldId id="1547"/>
           </p14:sldIdLst>
         </p14:section>
         <p14:section name="testing" id="{8E3AA920-E048-4638-9677-E7ABDDCA76E7}">
@@ -1174,8 +1174,8 @@
     <dgm:cxn modelId="{1A54CE04-8A96-4E4A-89DB-FB2A1A17744F}" type="presOf" srcId="{7FD8A240-07A6-F345-A4B5-9AFD7D04E09E}" destId="{8C7BF5B7-4285-C94D-AA34-B3807C7E91FB}" srcOrd="0" destOrd="0" presId="urn:microsoft.com/office/officeart/2005/8/layout/vList2"/>
     <dgm:cxn modelId="{63C3212D-1DCF-8044-A3CF-E372F4EA8362}" srcId="{0FC085B4-97CE-2149-B002-3BE96E991E3C}" destId="{11DE7530-2214-3A46-9779-D26EBB89B8D8}" srcOrd="1" destOrd="0" parTransId="{3BEBEC14-E9DD-5C4A-9EAF-10414B491D11}" sibTransId="{92A6A7B2-A1F5-D54F-B97F-04866B340CB4}"/>
     <dgm:cxn modelId="{97FF1C33-165D-9744-B9DD-5FD72C89A0A7}" type="presOf" srcId="{1680333F-291D-CB49-8833-C083699793E0}" destId="{B0272B02-624D-2445-B63B-A4B45C1ED737}" srcOrd="0" destOrd="0" presId="urn:microsoft.com/office/officeart/2005/8/layout/vList2"/>
+    <dgm:cxn modelId="{25C03C5A-4ECE-A34E-96BF-DE75E1E0F7EB}" type="presOf" srcId="{0FC085B4-97CE-2149-B002-3BE96E991E3C}" destId="{70B8A340-42D2-FA49-B0EC-FAFE4652EAD9}" srcOrd="0" destOrd="0" presId="urn:microsoft.com/office/officeart/2005/8/layout/vList2"/>
     <dgm:cxn modelId="{FBA34671-A6B0-B74F-B2B2-C18DD774C1FA}" type="presOf" srcId="{11DE7530-2214-3A46-9779-D26EBB89B8D8}" destId="{2FB78BDF-7C8F-1F41-8CD6-4B786B18D9FD}" srcOrd="0" destOrd="0" presId="urn:microsoft.com/office/officeart/2005/8/layout/vList2"/>
-    <dgm:cxn modelId="{25C03C5A-4ECE-A34E-96BF-DE75E1E0F7EB}" type="presOf" srcId="{0FC085B4-97CE-2149-B002-3BE96E991E3C}" destId="{70B8A340-42D2-FA49-B0EC-FAFE4652EAD9}" srcOrd="0" destOrd="0" presId="urn:microsoft.com/office/officeart/2005/8/layout/vList2"/>
     <dgm:cxn modelId="{96B4197D-2080-E246-BEDB-AC65A9B0EC38}" srcId="{0FC085B4-97CE-2149-B002-3BE96E991E3C}" destId="{A8E42F35-E34E-9E4B-A895-3BC748187CD3}" srcOrd="3" destOrd="0" parTransId="{8D054F3E-704E-1F47-866C-CB97D4DF2B6E}" sibTransId="{976463D6-3DF4-D14D-BDED-C1EC5A591A19}"/>
     <dgm:cxn modelId="{DD996A87-FB18-2B4E-B34F-9E0235E9B363}" srcId="{0FC085B4-97CE-2149-B002-3BE96E991E3C}" destId="{7FD8A240-07A6-F345-A4B5-9AFD7D04E09E}" srcOrd="0" destOrd="0" parTransId="{028B14B4-179B-914A-A696-BC38CCE94176}" sibTransId="{3862C498-2BCA-314C-82B5-D7FF7FA6942A}"/>
     <dgm:cxn modelId="{78A0C8DA-8CE3-C440-99CD-A857846AFA85}" type="presOf" srcId="{A8E42F35-E34E-9E4B-A895-3BC748187CD3}" destId="{E4AF1CAC-D73A-A24F-9293-09183EA92B01}" srcOrd="0" destOrd="0" presId="urn:microsoft.com/office/officeart/2005/8/layout/vList2"/>
@@ -2808,7 +2808,7 @@
               <a:rPr lang="en-US" smtClean="0">
                 <a:latin typeface="Segoe UI" pitchFamily="34" charset="0"/>
               </a:rPr>
-              <a:t>11/15/2022 9:37 AM</a:t>
+              <a:t>5/25/26 2:55 PM</a:t>
             </a:fld>
             <a:endParaRPr lang="en-US" dirty="0">
               <a:latin typeface="Segoe UI" pitchFamily="34" charset="0"/>
@@ -3105,7 +3105,7 @@
           <a:p>
             <a:fld id="{D18B56EA-E28F-4F92-9F16-7A6F2501B303}" type="datetime8">
               <a:rPr lang="en-US" smtClean="0"/>
-              <a:t>11/15/2022 9:37 AM</a:t>
+              <a:t>5/25/26 2:53 PM</a:t>
             </a:fld>
             <a:endParaRPr lang="en-US" dirty="0"/>
           </a:p>
@@ -3488,7 +3488,7 @@
           <a:p>
             <a:fld id="{D18B56EA-E28F-4F92-9F16-7A6F2501B303}" type="datetime8">
               <a:rPr lang="en-US" smtClean="0"/>
-              <a:t>11/15/2022 9:37 AM</a:t>
+              <a:t>5/25/26 2:53 PM</a:t>
             </a:fld>
             <a:endParaRPr lang="en-US" dirty="0"/>
           </a:p>
@@ -3691,7 +3691,7 @@
           <a:p>
             <a:fld id="{D18B56EA-E28F-4F92-9F16-7A6F2501B303}" type="datetime8">
               <a:rPr lang="en-US" smtClean="0"/>
-              <a:t>11/15/2022 9:37 AM</a:t>
+              <a:t>5/25/26 2:53 PM</a:t>
             </a:fld>
             <a:endParaRPr lang="en-US" dirty="0"/>
           </a:p>
@@ -3912,7 +3912,7 @@
           <a:p>
             <a:fld id="{D18B56EA-E28F-4F92-9F16-7A6F2501B303}" type="datetime8">
               <a:rPr lang="en-US" smtClean="0"/>
-              <a:t>11/15/2022 9:37 AM</a:t>
+              <a:t>5/25/26 2:53 PM</a:t>
             </a:fld>
             <a:endParaRPr lang="en-US" dirty="0"/>
           </a:p>
@@ -4159,7 +4159,7 @@
           <a:p>
             <a:fld id="{D18B56EA-E28F-4F92-9F16-7A6F2501B303}" type="datetime8">
               <a:rPr lang="en-US" smtClean="0"/>
-              <a:t>11/15/2022 9:47 AM</a:t>
+              <a:t>5/25/26 2:53 PM</a:t>
             </a:fld>
             <a:endParaRPr lang="en-US" dirty="0"/>
           </a:p>
@@ -4364,7 +4364,7 @@
           <a:p>
             <a:fld id="{D18B56EA-E28F-4F92-9F16-7A6F2501B303}" type="datetime8">
               <a:rPr lang="en-US" smtClean="0"/>
-              <a:t>11/15/2022 9:37 AM</a:t>
+              <a:t>5/25/26 2:53 PM</a:t>
             </a:fld>
             <a:endParaRPr lang="en-US" dirty="0"/>
           </a:p>
@@ -4608,7 +4608,7 @@
           <a:p>
             <a:fld id="{D18B56EA-E28F-4F92-9F16-7A6F2501B303}" type="datetime8">
               <a:rPr lang="en-US" smtClean="0"/>
-              <a:t>11/15/2022 9:37 AM</a:t>
+              <a:t>5/25/26 2:54 PM</a:t>
             </a:fld>
             <a:endParaRPr lang="en-US" dirty="0"/>
           </a:p>
@@ -4903,7 +4903,7 @@
           <a:p>
             <a:fld id="{D18B56EA-E28F-4F92-9F16-7A6F2501B303}" type="datetime8">
               <a:rPr lang="en-US" smtClean="0"/>
-              <a:t>11/15/2022 9:37 AM</a:t>
+              <a:t>5/25/26 2:54 PM</a:t>
             </a:fld>
             <a:endParaRPr lang="en-US" dirty="0"/>
           </a:p>
@@ -5132,7 +5132,7 @@
           <a:p>
             <a:fld id="{D18B56EA-E28F-4F92-9F16-7A6F2501B303}" type="datetime8">
               <a:rPr lang="en-US" smtClean="0"/>
-              <a:t>11/15/2022 9:37 AM</a:t>
+              <a:t>5/25/26 2:54 PM</a:t>
             </a:fld>
             <a:endParaRPr lang="en-US" dirty="0"/>
           </a:p>
@@ -5313,7 +5313,7 @@
           <a:p>
             <a:fld id="{D18B56EA-E28F-4F92-9F16-7A6F2501B303}" type="datetime8">
               <a:rPr lang="en-US" smtClean="0"/>
-              <a:t>11/15/2022 9:37 AM</a:t>
+              <a:t>5/25/26 2:54 PM</a:t>
             </a:fld>
             <a:endParaRPr lang="en-US" dirty="0"/>
           </a:p>
@@ -5494,7 +5494,7 @@
           <a:p>
             <a:fld id="{D18B56EA-E28F-4F92-9F16-7A6F2501B303}" type="datetime8">
               <a:rPr lang="en-US" smtClean="0"/>
-              <a:t>11/15/2022 9:37 AM</a:t>
+              <a:t>5/25/26 2:54 PM</a:t>
             </a:fld>
             <a:endParaRPr lang="en-US" dirty="0"/>
           </a:p>
@@ -5675,7 +5675,7 @@
           <a:p>
             <a:fld id="{D18B56EA-E28F-4F92-9F16-7A6F2501B303}" type="datetime8">
               <a:rPr lang="en-US" smtClean="0"/>
-              <a:t>11/15/2022 9:37 AM</a:t>
+              <a:t>5/25/26 2:54 PM</a:t>
             </a:fld>
             <a:endParaRPr lang="en-US" dirty="0"/>
           </a:p>
@@ -5859,7 +5859,7 @@
           <a:p>
             <a:fld id="{D18B56EA-E28F-4F92-9F16-7A6F2501B303}" type="datetime8">
               <a:rPr lang="en-US" smtClean="0"/>
-              <a:t>11/15/2022 9:37 AM</a:t>
+              <a:t>5/25/26 2:53 PM</a:t>
             </a:fld>
             <a:endParaRPr lang="en-US" dirty="0"/>
           </a:p>
@@ -6040,7 +6040,7 @@
           <a:p>
             <a:fld id="{D18B56EA-E28F-4F92-9F16-7A6F2501B303}" type="datetime8">
               <a:rPr lang="en-US" smtClean="0"/>
-              <a:t>11/15/2022 9:37 AM</a:t>
+              <a:t>5/25/26 2:54 PM</a:t>
             </a:fld>
             <a:endParaRPr lang="en-US" dirty="0"/>
           </a:p>
@@ -6286,7 +6286,7 @@
           <a:p>
             <a:fld id="{D18B56EA-E28F-4F92-9F16-7A6F2501B303}" type="datetime8">
               <a:rPr lang="en-US" smtClean="0"/>
-              <a:t>11/15/2022 9:37 AM</a:t>
+              <a:t>5/25/26 2:53 PM</a:t>
             </a:fld>
             <a:endParaRPr lang="en-US" dirty="0"/>
           </a:p>
@@ -6509,7 +6509,7 @@
           <a:p>
             <a:fld id="{D18B56EA-E28F-4F92-9F16-7A6F2501B303}" type="datetime8">
               <a:rPr lang="en-US" smtClean="0"/>
-              <a:t>11/15/2022 9:37 AM</a:t>
+              <a:t>5/25/26 2:53 PM</a:t>
             </a:fld>
             <a:endParaRPr lang="en-US" dirty="0"/>
           </a:p>
@@ -6717,7 +6717,7 @@
           <a:p>
             <a:fld id="{D18B56EA-E28F-4F92-9F16-7A6F2501B303}" type="datetime8">
               <a:rPr lang="en-US" smtClean="0"/>
-              <a:t>11/15/2022 9:37 AM</a:t>
+              <a:t>5/25/26 2:53 PM</a:t>
             </a:fld>
             <a:endParaRPr lang="en-US" dirty="0"/>
           </a:p>
@@ -6917,7 +6917,7 @@
           <a:p>
             <a:fld id="{D18B56EA-E28F-4F92-9F16-7A6F2501B303}" type="datetime8">
               <a:rPr lang="en-US" smtClean="0"/>
-              <a:t>11/15/2022 9:37 AM</a:t>
+              <a:t>5/25/26 2:53 PM</a:t>
             </a:fld>
             <a:endParaRPr lang="en-US" dirty="0"/>
           </a:p>
@@ -7006,7 +7006,7 @@
           <a:p>
             <a:r>
               <a:rPr lang="en-US" dirty="0"/>
-              <a:t>The Yeoman generator for the SharePoint Framework creates the scaffolding (*folders &amp; files*) for a new SharePoint Framework project. After building the project the first time, you'll see even more folders and files present. Just like a .NET Framework project, some of the generated files are temporary and shouldn't be kept in source control.</a:t>
+              <a:t>The Yeoman generator for the SharePoint Framework creates the scaffolding (*folders &amp; files*) for a new SharePoint Framework project. After building the project the first time, you'll see even more folders and files present. Just like a .NET Framework project, some of the generated files are temporary and should not be kept in source control. </a:t>
             </a:r>
           </a:p>
           <a:p>
@@ -7022,38 +7022,158 @@
             <a:endParaRPr lang="en-US" dirty="0"/>
           </a:p>
           <a:p>
-            <a:r>
-              <a:rPr lang="en-US" dirty="0"/>
-              <a:t>![Screenshot of a SharePoint Framework project in VS Code](../media/02-project-structure.png)</a:t>
-            </a:r>
-          </a:p>
-          <a:p>
+            <a:pPr marL="171450" indent="-171450">
+              <a:buFont typeface="Arial" panose="020B0604020202020204" pitchFamily="34" charset="0"/>
+              <a:buChar char="•"/>
+            </a:pPr>
+            <a:r>
+              <a:rPr lang="en-US" dirty="0"/>
+              <a:t>**.</a:t>
+            </a:r>
+            <a:r>
+              <a:rPr lang="en-US" dirty="0" err="1"/>
+              <a:t>vscode</a:t>
+            </a:r>
+            <a:r>
+              <a:rPr lang="en-US" dirty="0"/>
+              <a:t>**: This folder contains contains Visual Studio Code specific files.</a:t>
+            </a:r>
+          </a:p>
+          <a:p>
+            <a:pPr marL="171450" indent="-171450">
+              <a:buFont typeface="Arial" panose="020B0604020202020204" pitchFamily="34" charset="0"/>
+              <a:buChar char="•"/>
+            </a:pPr>
+            <a:r>
+              <a:rPr lang="en-US" dirty="0"/>
+              <a:t>**config**: This folder contains configuration files used by the project's various build tasks. You'll edit these files as necessary depending on the types of components you're creating and for specific situations, such as the site to test extensions or adding references to external libraries.</a:t>
+            </a:r>
+          </a:p>
+          <a:p>
+            <a:pPr marL="171450" indent="-171450">
+              <a:buFont typeface="Arial" panose="020B0604020202020204" pitchFamily="34" charset="0"/>
+              <a:buChar char="•"/>
+            </a:pPr>
+            <a:r>
+              <a:rPr lang="en-US" dirty="0"/>
+              <a:t>**</a:t>
+            </a:r>
+            <a:r>
+              <a:rPr lang="en-US" dirty="0" err="1"/>
+              <a:t>dist</a:t>
+            </a:r>
+            <a:r>
+              <a:rPr lang="en-US" dirty="0"/>
+              <a:t>**: This folder contains the files generated when you bundle your project, regardless of which switch you use. The </a:t>
+            </a:r>
+            <a:r>
+              <a:rPr lang="en-US" dirty="0" err="1"/>
+              <a:t>unminified</a:t>
+            </a:r>
+            <a:r>
+              <a:rPr lang="en-US" dirty="0"/>
+              <a:t> JavaScript files and source maps contained in this folder are used when you run in debug mode.</a:t>
+            </a:r>
+          </a:p>
+          <a:p>
+            <a:pPr marL="171450" indent="-171450">
+              <a:buFont typeface="Arial" panose="020B0604020202020204" pitchFamily="34" charset="0"/>
+              <a:buChar char="•"/>
+            </a:pPr>
+            <a:r>
+              <a:rPr lang="en-US" dirty="0"/>
+              <a:t>**lib**: This folder, created automatically when you build the project, contains the temporary files generated from the compilation and transpilation of TypeScript to JavaScript and SCSS to CSS files.</a:t>
+            </a:r>
+          </a:p>
+          <a:p>
+            <a:pPr marL="171450" indent="-171450">
+              <a:buFont typeface="Arial" panose="020B0604020202020204" pitchFamily="34" charset="0"/>
+              <a:buChar char="•"/>
+            </a:pPr>
+            <a:r>
+              <a:rPr lang="en-US" dirty="0"/>
+              <a:t>**</a:t>
+            </a:r>
+            <a:r>
+              <a:rPr lang="en-US" dirty="0" err="1"/>
+              <a:t>node_modules</a:t>
+            </a:r>
+            <a:r>
+              <a:rPr lang="en-US" dirty="0"/>
+              <a:t>**: This folder is created automatically when installing package dependencies using the `</a:t>
+            </a:r>
+            <a:r>
+              <a:rPr lang="en-US" dirty="0" err="1"/>
+              <a:t>npm</a:t>
+            </a:r>
+            <a:r>
+              <a:rPr lang="en-US" dirty="0"/>
+              <a:t> install` command.</a:t>
+            </a:r>
+          </a:p>
+          <a:p>
+            <a:pPr marL="171450" indent="-171450">
+              <a:buFont typeface="Arial" panose="020B0604020202020204" pitchFamily="34" charset="0"/>
+              <a:buChar char="•"/>
+            </a:pPr>
+            <a:r>
+              <a:rPr lang="en-US" dirty="0"/>
+              <a:t>**release**: This folder contains a subfolder named **assets** that contains the files generated when you bundle your project using the `ship` or `production` switch. These files are deployed to the CDN. This folder also contains two additional subfolders that contain manifest files.</a:t>
+            </a:r>
+          </a:p>
+          <a:p>
+            <a:pPr marL="171450" indent="-171450">
+              <a:buFont typeface="Arial" panose="020B0604020202020204" pitchFamily="34" charset="0"/>
+              <a:buChar char="•"/>
+            </a:pPr>
+            <a:r>
+              <a:rPr lang="en-US" dirty="0"/>
+              <a:t>**</a:t>
+            </a:r>
+            <a:r>
+              <a:rPr lang="en-US" dirty="0" err="1"/>
+              <a:t>src</a:t>
+            </a:r>
+            <a:r>
+              <a:rPr lang="en-US" dirty="0"/>
+              <a:t>**: This folder contains all the source code for your project.</a:t>
+            </a:r>
+          </a:p>
+          <a:p>
+            <a:pPr marL="171450" indent="-171450">
+              <a:buFont typeface="Arial" panose="020B0604020202020204" pitchFamily="34" charset="0"/>
+              <a:buChar char="•"/>
+            </a:pPr>
+            <a:r>
+              <a:rPr lang="en-US" dirty="0"/>
+              <a:t>**temp**: This folder, created automatically when you test the project, contains files used by the local development web server.</a:t>
+            </a:r>
+          </a:p>
+          <a:p>
+            <a:pPr marL="171450" indent="-171450">
+              <a:buFont typeface="Arial" panose="020B0604020202020204" pitchFamily="34" charset="0"/>
+              <a:buChar char="•"/>
+            </a:pPr>
             <a:endParaRPr lang="en-US" dirty="0"/>
           </a:p>
           <a:p>
-            <a:r>
-              <a:rPr lang="en-US" dirty="0"/>
-              <a:t>- **.</a:t>
-            </a:r>
-            <a:r>
-              <a:rPr lang="en-US" dirty="0" err="1"/>
-              <a:t>vscode</a:t>
-            </a:r>
-            <a:r>
-              <a:rPr lang="en-US" dirty="0"/>
-              <a:t>**: This folder contains Visual Studio Code specific files.</a:t>
-            </a:r>
-          </a:p>
-          <a:p>
-            <a:r>
-              <a:rPr lang="en-US" dirty="0"/>
-              <a:t>- **config**: This folder contains configuration files used by the project's various build tasks. You'll edit these files as necessary depending on the types of components you're creating and for specific situations, such as the site to test extensions or adding references to external libraries.</a:t>
-            </a:r>
-          </a:p>
-          <a:p>
-            <a:r>
-              <a:rPr lang="en-US" dirty="0"/>
-              <a:t>- **</a:t>
+            <a:pPr marL="0" indent="0">
+              <a:buFont typeface="Arial" panose="020B0604020202020204" pitchFamily="34" charset="0"/>
+              <a:buNone/>
+            </a:pPr>
+            <a:r>
+              <a:rPr lang="en-US" dirty="0"/>
+              <a:t>&gt; [!NOTE]</a:t>
+            </a:r>
+          </a:p>
+          <a:p>
+            <a:pPr marL="0" indent="0">
+              <a:buFont typeface="Arial" panose="020B0604020202020204" pitchFamily="34" charset="0"/>
+              <a:buNone/>
+            </a:pPr>
+            <a:r>
+              <a:rPr lang="en-US" dirty="0"/>
+              <a:t>&gt; The **</a:t>
             </a:r>
             <a:r>
               <a:rPr lang="en-US" dirty="0" err="1"/>
@@ -7061,117 +7181,32 @@
             </a:r>
             <a:r>
               <a:rPr lang="en-US" dirty="0"/>
-              <a:t>**: This folder contains the files generated when you bundle your project, regardless of which switch you use. The </a:t>
-            </a:r>
-            <a:r>
-              <a:rPr lang="en-US" dirty="0" err="1"/>
-              <a:t>unminified</a:t>
-            </a:r>
-            <a:r>
-              <a:rPr lang="en-US" dirty="0"/>
-              <a:t> JavaScript files and source maps contained in this folder are used when you run in debug mode.</a:t>
-            </a:r>
-          </a:p>
-          <a:p>
-            <a:r>
-              <a:rPr lang="en-US" dirty="0"/>
-              <a:t>- **lib**: This folder, created automatically when you build the project, contains the temporary files generated from the compilation and transpilation of TypeScript to JavaScript and SCSS to CSS files.</a:t>
-            </a:r>
-          </a:p>
-          <a:p>
-            <a:pPr marL="171450" indent="-171450">
-              <a:buFontTx/>
-              <a:buChar char="-"/>
+              <a:t>**, **lib**, **</a:t>
+            </a:r>
+            <a:r>
+              <a:rPr lang="en-US" dirty="0" err="1"/>
+              <a:t>node_modules</a:t>
+            </a:r>
+            <a:r>
+              <a:rPr lang="en-US" dirty="0"/>
+              <a:t>**, and **temp** folders should not be committed to your source control solution because they are automatically generated by the build process and when installing or restoring dependencies.</a:t>
+            </a:r>
+          </a:p>
+          <a:p>
+            <a:pPr marL="0" indent="0">
+              <a:buFont typeface="Arial" panose="020B0604020202020204" pitchFamily="34" charset="0"/>
+              <a:buNone/>
             </a:pPr>
             <a:r>
               <a:rPr lang="en-US" dirty="0"/>
-              <a:t>**</a:t>
-            </a:r>
-            <a:r>
-              <a:rPr lang="en-US" dirty="0" err="1"/>
-              <a:t>node_modules</a:t>
-            </a:r>
-            <a:r>
-              <a:rPr lang="en-US" dirty="0"/>
-              <a:t>**: This folder is created automatically when installing package dependencies using the `</a:t>
-            </a:r>
-            <a:r>
-              <a:rPr lang="en-US" dirty="0" err="1"/>
-              <a:t>npm</a:t>
-            </a:r>
-            <a:r>
-              <a:rPr lang="en-US" dirty="0"/>
-              <a:t> install` command.</a:t>
-            </a:r>
-          </a:p>
-          <a:p>
-            <a:pPr marL="171450" indent="-171450">
-              <a:buFontTx/>
-              <a:buChar char="-"/>
+              <a:t>&gt;</a:t>
+            </a:r>
+          </a:p>
+          <a:p>
+            <a:pPr marL="0" indent="0">
+              <a:buFont typeface="Arial" panose="020B0604020202020204" pitchFamily="34" charset="0"/>
+              <a:buNone/>
             </a:pPr>
-            <a:r>
-              <a:rPr lang="en-US" dirty="0"/>
-              <a:t>**release**: This folder contains a subfolder named **assets** that contains the files generated when you bundle your project using the `ship` or `production` switch. These files are deployed to the CDN. This folder also contains two additional subfolders that contain manifest files.</a:t>
-            </a:r>
-          </a:p>
-          <a:p>
-            <a:r>
-              <a:rPr lang="en-US" dirty="0"/>
-              <a:t>- **</a:t>
-            </a:r>
-            <a:r>
-              <a:rPr lang="en-US" dirty="0" err="1"/>
-              <a:t>src</a:t>
-            </a:r>
-            <a:r>
-              <a:rPr lang="en-US" dirty="0"/>
-              <a:t>**: This folder contains all the source code for your project.</a:t>
-            </a:r>
-          </a:p>
-          <a:p>
-            <a:r>
-              <a:rPr lang="en-US" dirty="0"/>
-              <a:t>- **temp**: This folder, created automatically when you test the project, contains files used by the local development web server.</a:t>
-            </a:r>
-          </a:p>
-          <a:p>
-            <a:endParaRPr lang="en-US" dirty="0"/>
-          </a:p>
-          <a:p>
-            <a:r>
-              <a:rPr lang="en-US" dirty="0"/>
-              <a:t>&gt; [!NOTE]</a:t>
-            </a:r>
-          </a:p>
-          <a:p>
-            <a:r>
-              <a:rPr lang="en-US" dirty="0"/>
-              <a:t>&gt; The **</a:t>
-            </a:r>
-            <a:r>
-              <a:rPr lang="en-US" dirty="0" err="1"/>
-              <a:t>dist</a:t>
-            </a:r>
-            <a:r>
-              <a:rPr lang="en-US" dirty="0"/>
-              <a:t>**, **lib**, **</a:t>
-            </a:r>
-            <a:r>
-              <a:rPr lang="en-US" dirty="0" err="1"/>
-              <a:t>node_modules</a:t>
-            </a:r>
-            <a:r>
-              <a:rPr lang="en-US" dirty="0"/>
-              <a:t>**, and **temp** folders should not be committed to your source control solution because they are automatically generated by the build process and when installing or restoring dependencies.</a:t>
-            </a:r>
-          </a:p>
-          <a:p>
-            <a:r>
-              <a:rPr lang="en-US" dirty="0"/>
-              <a:t>&gt;</a:t>
-            </a:r>
-          </a:p>
-          <a:p>
             <a:r>
               <a:rPr lang="en-US" dirty="0"/>
               <a:t>&gt; These folders are similar to the **bin**, **obj**, and **packages** folder generated in a .NET project.</a:t>
@@ -7516,7 +7551,7 @@
           <a:p>
             <a:fld id="{D18B56EA-E28F-4F92-9F16-7A6F2501B303}" type="datetime8">
               <a:rPr lang="en-US" smtClean="0"/>
-              <a:t>11/15/2022 9:37 AM</a:t>
+              <a:t>5/25/26 2:53 PM</a:t>
             </a:fld>
             <a:endParaRPr lang="en-US" dirty="0"/>
           </a:p>
@@ -7754,7 +7789,7 @@
           <a:p>
             <a:fld id="{D18B56EA-E28F-4F92-9F16-7A6F2501B303}" type="datetime8">
               <a:rPr lang="en-US" smtClean="0"/>
-              <a:t>11/15/2022 9:37 AM</a:t>
+              <a:t>5/25/26 2:53 PM</a:t>
             </a:fld>
             <a:endParaRPr lang="en-US" dirty="0"/>
           </a:p>
@@ -24238,7 +24273,7 @@
         <p:spPr>
           <a:xfrm>
             <a:off x="464400" y="1212850"/>
-            <a:ext cx="11574000" cy="4431983"/>
+            <a:ext cx="7746346" cy="5761577"/>
           </a:xfrm>
         </p:spPr>
         <p:txBody>
@@ -24267,11 +24302,11 @@
                   <a:schemeClr val="accent1"/>
                 </a:solidFill>
               </a:rPr>
-              <a:t>:</a:t>
-            </a:r>
-            <a:r>
-              <a:rPr lang="en-US" dirty="0"/>
-              <a:t> includes Visual Studio Code integration files</a:t>
+              <a:t>: </a:t>
+            </a:r>
+            <a:r>
+              <a:rPr lang="en-US" dirty="0"/>
+              <a:t>contains VS Code integration files</a:t>
             </a:r>
           </a:p>
           <a:p>
@@ -24285,7 +24320,7 @@
             </a:r>
             <a:r>
               <a:rPr lang="en-US" dirty="0"/>
-              <a:t> includes all config files</a:t>
+              <a:t> contains all config files</a:t>
             </a:r>
           </a:p>
           <a:p>
@@ -24317,7 +24352,35 @@
                   <a:schemeClr val="accent1"/>
                 </a:solidFill>
               </a:rPr>
-              <a:t>lib:</a:t>
+              <a:t>lib </a:t>
+            </a:r>
+            <a:r>
+              <a:rPr lang="en-US" dirty="0"/>
+              <a:t>&amp; </a:t>
+            </a:r>
+            <a:r>
+              <a:rPr lang="en-US" dirty="0">
+                <a:solidFill>
+                  <a:schemeClr val="accent1"/>
+                </a:solidFill>
+              </a:rPr>
+              <a:t>lib-</a:t>
+            </a:r>
+            <a:r>
+              <a:rPr lang="en-US" dirty="0" err="1">
+                <a:solidFill>
+                  <a:schemeClr val="accent1"/>
+                </a:solidFill>
+              </a:rPr>
+              <a:t>commonjs</a:t>
+            </a:r>
+            <a:r>
+              <a:rPr lang="en-US" dirty="0">
+                <a:solidFill>
+                  <a:schemeClr val="accent1"/>
+                </a:solidFill>
+              </a:rPr>
+              <a:t>:</a:t>
             </a:r>
             <a:r>
               <a:rPr lang="en-US" dirty="0"/>
@@ -24350,7 +24413,7 @@
             <a:r>
               <a:rPr lang="en-US" dirty="0">
                 <a:solidFill>
-                  <a:schemeClr val="accent1"/>
+                  <a:srgbClr val="FF0000"/>
                 </a:solidFill>
               </a:rPr>
               <a:t>release:</a:t>
@@ -24367,7 +24430,7 @@
                   <a:schemeClr val="accent1"/>
                 </a:solidFill>
               </a:rPr>
-              <a:t>sharepoint</a:t>
+              <a:t>src</a:t>
             </a:r>
             <a:r>
               <a:rPr lang="en-US" dirty="0">
@@ -24379,29 +24442,21 @@
             </a:r>
             <a:r>
               <a:rPr lang="en-US" dirty="0"/>
-              <a:t> contains assets needed for deployment</a:t>
-            </a:r>
-          </a:p>
-          <a:p>
-            <a:r>
-              <a:rPr lang="en-US" dirty="0" err="1">
-                <a:solidFill>
-                  <a:schemeClr val="accent1"/>
-                </a:solidFill>
-              </a:rPr>
-              <a:t>src</a:t>
-            </a:r>
+              <a:t> this is the main folder of the project, it includes the web part, styles, and a test file</a:t>
+            </a:r>
+          </a:p>
+          <a:p>
             <a:r>
               <a:rPr lang="en-US" dirty="0">
                 <a:solidFill>
                   <a:schemeClr val="accent1"/>
                 </a:solidFill>
               </a:rPr>
-              <a:t>:</a:t>
-            </a:r>
-            <a:r>
-              <a:rPr lang="en-US" dirty="0"/>
-              <a:t> this is the main folder of the project, it includes the extension, styles, and a test file</a:t>
+              <a:t>teams: </a:t>
+            </a:r>
+            <a:r>
+              <a:rPr lang="en-US" dirty="0"/>
+              <a:t>images for a possible Teams app</a:t>
             </a:r>
           </a:p>
           <a:p>
@@ -24443,10 +24498,41 @@
           </a:p>
         </p:txBody>
       </p:sp>
+      <p:pic>
+        <p:nvPicPr>
+          <p:cNvPr id="5" name="Picture 4">
+            <a:extLst>
+              <a:ext uri="{FF2B5EF4-FFF2-40B4-BE49-F238E27FC236}">
+                <a16:creationId xmlns:a16="http://schemas.microsoft.com/office/drawing/2014/main" id="{29B65E5B-CAF9-6D93-F8C0-C80E8C72A37B}"/>
+              </a:ext>
+            </a:extLst>
+          </p:cNvPr>
+          <p:cNvPicPr>
+            <a:picLocks noChangeAspect="1"/>
+          </p:cNvPicPr>
+          <p:nvPr/>
+        </p:nvPicPr>
+        <p:blipFill>
+          <a:blip r:embed="rId3"/>
+          <a:srcRect t="5342"/>
+          <a:stretch>
+            <a:fillRect/>
+          </a:stretch>
+        </p:blipFill>
+        <p:spPr>
+          <a:xfrm>
+            <a:off x="8449507" y="186832"/>
+            <a:ext cx="3522568" cy="6620859"/>
+          </a:xfrm>
+          <a:prstGeom prst="rect">
+            <a:avLst/>
+          </a:prstGeom>
+        </p:spPr>
+      </p:pic>
     </p:spTree>
     <p:extLst>
       <p:ext uri="{BB962C8B-B14F-4D97-AF65-F5344CB8AC3E}">
-        <p14:creationId xmlns:p14="http://schemas.microsoft.com/office/powerpoint/2010/main" val="580721042"/>
+        <p14:creationId xmlns:p14="http://schemas.microsoft.com/office/powerpoint/2010/main" val="616216480"/>
       </p:ext>
     </p:extLst>
   </p:cSld>
